--- a/public/fun/pack/pptx/weddingpro/결혼식프리미엄_48_식순중심_일렉트릭바이올렛.pptx
+++ b/public/fun/pack/pptx/weddingpro/결혼식프리미엄_48_식순중심_일렉트릭바이올렛.pptx
@@ -113,12 +113,12 @@
   <p:extLst>
     <p:ext uri="{521415D9-36F7-43E2-AB2F-B90AF26B5E84}">
       <p14:sectionLst xmlns:p14="http://schemas.microsoft.com/office/powerpoint/2010/main">
-        <p14:section name="시작" id="{A8D667C6-B8B8-4E56-9C96-F2DBA4CD5E5C}">
+        <p14:section name="시작" id="{A8A302AD-4171-46D9-8E69-C7A7FC11F199}">
           <p14:sldIdLst>
             <p14:sldId id="256"/>
           </p14:sldIdLst>
         </p14:section>
-        <p14:section name="본문" id="{CDB8B5E9-74CF-4679-8383-6E0927E1A2A7}">
+        <p14:section name="본문" id="{962EDA85-A3CD-4E60-933D-C6B134C7F990}">
           <p14:sldIdLst>
             <p14:sldId id="257"/>
             <p14:sldId id="258"/>
@@ -127,7 +127,7 @@
             <p14:sldId id="261"/>
           </p14:sldIdLst>
         </p14:section>
-        <p14:section name="마무리" id="{5351952C-7F26-4C66-A068-5022E30C9539}">
+        <p14:section name="마무리" id="{335FDC81-7275-4A0E-A2BC-78E4BF46C62D}">
           <p14:sldIdLst>
             <p14:sldId id="262"/>
           </p14:sldIdLst>
@@ -1536,7 +1536,7 @@
             </a:lvl1pPr>
           </a:lstStyle>
           <a:p>
-            <a:fld id="{9167AF38-6C73-4D1F-B1AB-50E5831BAF10}" type="slidenum">
+            <a:fld id="{3741C1EE-3AFC-4C31-9DFC-8A9681AE5BFB}" type="slidenum">
               <a:rPr lang="en-US"/>
               <a:t>‹#›</a:t>
             </a:fld>
@@ -2161,7 +2161,7 @@
             </a:lvl1pPr>
           </a:lstStyle>
           <a:p>
-            <a:fld id="{E7D3994B-8DE9-44A4-8F69-C28954879A3E}" type="slidenum">
+            <a:fld id="{0F6C6375-5ED6-417A-AFC2-4104BACC5375}" type="slidenum">
               <a:rPr lang="en-US"/>
               <a:t>‹#›</a:t>
             </a:fld>
@@ -2790,7 +2790,7 @@
             </a:lvl1pPr>
           </a:lstStyle>
           <a:p>
-            <a:fld id="{29A3B037-302C-4521-80D0-7B260BAA3603}" type="slidenum">
+            <a:fld id="{199D8DCC-D2EB-4B97-A153-32B43F0BF4F5}" type="slidenum">
               <a:rPr lang="en-US"/>
               <a:t>‹#›</a:t>
             </a:fld>
@@ -3649,7 +3649,7 @@
           <a:p>
             <a:r>
               <a:rPr lang="ko-KR"/>
-              <a:t>0000. 00. 00 · 예식장 이름</a:t>
+              <a:t>날짜 입력 · 예식장 이름</a:t>
             </a:r>
           </a:p>
         </p:txBody>
@@ -3870,7 +3870,7 @@
           <a:bodyPr/>
           <a:lstStyle/>
           <a:p>
-            <a:fld id="{5F0E6130-C1C1-411E-9447-639C586C3154}" type="slidenum">
+            <a:fld id="{8E363743-E3F1-4EC4-BA75-FAD220378E8D}" type="slidenum">
               <a:rPr lang="en-US"/>
               <a:t>‹#›</a:t>
             </a:fld>
@@ -4272,7 +4272,7 @@
           <a:bodyPr/>
           <a:lstStyle/>
           <a:p>
-            <a:fld id="{1A603C99-D498-4EF6-A527-2C3B0651CA24}" type="slidenum">
+            <a:fld id="{7041A4E3-BA46-444E-BC5B-84C3227AEA6F}" type="slidenum">
               <a:rPr lang="en-US"/>
               <a:t>‹#›</a:t>
             </a:fld>
@@ -5101,7 +5101,7 @@
           <a:bodyPr/>
           <a:lstStyle/>
           <a:p>
-            <a:fld id="{29216E22-3D83-4C4B-950E-9E84687EE54A}" type="slidenum">
+            <a:fld id="{1A26A910-E41E-4A07-BA6E-9A81E2557539}" type="slidenum">
               <a:rPr lang="en-US"/>
               <a:t>‹#›</a:t>
             </a:fld>
@@ -6377,7 +6377,7 @@
           <a:bodyPr/>
           <a:lstStyle/>
           <a:p>
-            <a:fld id="{46D41DE1-10A4-4264-AAB8-1089A0ED9FAC}" type="slidenum">
+            <a:fld id="{334D72BC-9B9E-4250-8929-4F5913C381B3}" type="slidenum">
               <a:rPr lang="en-US"/>
               <a:t>‹#›</a:t>
             </a:fld>
@@ -6465,7 +6465,7 @@
           <a:bodyPr/>
           <a:lstStyle/>
           <a:p>
-            <a:fld id="{7567AF43-601B-44B3-807E-C020E0EA24B2}" type="slidenum">
+            <a:fld id="{8C488FBA-77A3-4D66-854B-EFA6BB966590}" type="slidenum">
               <a:rPr lang="en-US"/>
               <a:t>‹#›</a:t>
             </a:fld>
